--- a/mql5/EA_Backtesting_Presentation.pptx
+++ b/mql5/EA_Backtesting_Presentation.pptx
@@ -217,7 +217,7 @@
           <a:p>
             <a:fld id="{DCF69B24-79E8-459C-A2BF-3B57F85E7124}" type="datetimeFigureOut">
               <a:rPr lang="en-US" smtClean="0"/>
-              <a:t>4/30/2025</a:t>
+              <a:t>3/28/2026</a:t>
             </a:fld>
             <a:endParaRPr lang="en-US"/>
           </a:p>
@@ -889,7 +889,7 @@
           <a:p>
             <a:fld id="{920A513A-B5AA-4333-9695-00B7F56044FA}" type="datetime1">
               <a:rPr lang="en-US" smtClean="0"/>
-              <a:t>4/30/2025</a:t>
+              <a:t>3/28/2026</a:t>
             </a:fld>
             <a:endParaRPr lang="en-US"/>
           </a:p>
@@ -1076,7 +1076,7 @@
           <a:p>
             <a:fld id="{1386CF12-5876-49A3-88B8-B63608CE81C6}" type="datetime1">
               <a:rPr lang="en-US" smtClean="0"/>
-              <a:t>4/30/2025</a:t>
+              <a:t>3/28/2026</a:t>
             </a:fld>
             <a:endParaRPr lang="en-US"/>
           </a:p>
@@ -1263,7 +1263,7 @@
           <a:p>
             <a:fld id="{602AB0C2-4A64-4A13-9F62-6A0953A3BAAF}" type="datetime1">
               <a:rPr lang="en-US" smtClean="0"/>
-              <a:t>4/30/2025</a:t>
+              <a:t>3/28/2026</a:t>
             </a:fld>
             <a:endParaRPr lang="en-US"/>
           </a:p>
@@ -1436,7 +1436,7 @@
           <a:p>
             <a:fld id="{79F9BDB8-897E-43CA-9590-370F1645F02D}" type="datetime1">
               <a:rPr lang="en-US" smtClean="0"/>
-              <a:t>4/30/2025</a:t>
+              <a:t>3/28/2026</a:t>
             </a:fld>
             <a:endParaRPr lang="en-US"/>
           </a:p>
@@ -1764,7 +1764,7 @@
           <a:p>
             <a:fld id="{DE2F9AFF-7BF0-4711-B433-C2A453B72C62}" type="datetime1">
               <a:rPr lang="en-US" smtClean="0"/>
-              <a:t>4/30/2025</a:t>
+              <a:t>3/28/2026</a:t>
             </a:fld>
             <a:endParaRPr lang="en-US"/>
           </a:p>
@@ -2165,7 +2165,7 @@
           <a:p>
             <a:fld id="{F3CF86DD-0D5B-4FA8-82C0-BA7C3D478AA4}" type="datetime1">
               <a:rPr lang="en-US" smtClean="0"/>
-              <a:t>4/30/2025</a:t>
+              <a:t>3/28/2026</a:t>
             </a:fld>
             <a:endParaRPr lang="en-US"/>
           </a:p>
@@ -2602,7 +2602,7 @@
           <a:p>
             <a:fld id="{F5BF3CB8-6529-4FF4-8128-4A6F78700D40}" type="datetime1">
               <a:rPr lang="en-US" smtClean="0"/>
-              <a:t>4/30/2025</a:t>
+              <a:t>3/28/2026</a:t>
             </a:fld>
             <a:endParaRPr lang="en-US"/>
           </a:p>
@@ -2733,7 +2733,7 @@
           <a:p>
             <a:fld id="{EA4A6CB3-D503-436F-B9D7-CE7CA647CF23}" type="datetime1">
               <a:rPr lang="en-US" smtClean="0"/>
-              <a:t>4/30/2025</a:t>
+              <a:t>3/28/2026</a:t>
             </a:fld>
             <a:endParaRPr lang="en-US"/>
           </a:p>
@@ -2841,7 +2841,7 @@
           <a:p>
             <a:fld id="{9F1C5E51-B921-4CFA-803D-2CFAE21BC9E4}" type="datetime1">
               <a:rPr lang="en-US" smtClean="0"/>
-              <a:t>4/30/2025</a:t>
+              <a:t>3/28/2026</a:t>
             </a:fld>
             <a:endParaRPr lang="en-US"/>
           </a:p>
@@ -3285,7 +3285,7 @@
           <a:p>
             <a:fld id="{9B6EB65A-D61B-4D2D-B70F-BC33C2274F7D}" type="datetime1">
               <a:rPr lang="en-US" smtClean="0"/>
-              <a:t>4/30/2025</a:t>
+              <a:t>3/28/2026</a:t>
             </a:fld>
             <a:endParaRPr lang="en-US"/>
           </a:p>
@@ -3715,7 +3715,7 @@
           <a:p>
             <a:fld id="{B648A38E-CE9F-45F6-BEB1-3EAE58135DF9}" type="datetime1">
               <a:rPr lang="en-US" smtClean="0"/>
-              <a:t>4/30/2025</a:t>
+              <a:t>3/28/2026</a:t>
             </a:fld>
             <a:endParaRPr lang="en-US"/>
           </a:p>
@@ -4000,7 +4000,7 @@
           <a:p>
             <a:fld id="{3BBEDE66-2C92-4BB6-94B7-C538386E99D2}" type="datetime1">
               <a:rPr lang="en-US" smtClean="0"/>
-              <a:t>4/30/2025</a:t>
+              <a:t>3/28/2026</a:t>
             </a:fld>
             <a:endParaRPr lang="en-US"/>
           </a:p>
@@ -4645,7 +4645,7 @@
           <a:p>
             <a:r>
               <a:rPr lang="en-US" sz="2000" dirty="0"/>
-              <a:t>https://www.youtube.com/@DigitsOnPrograms/videos</a:t>
+              <a:t>https://www.youtube.com/@GuardianAlgo</a:t>
             </a:r>
           </a:p>
         </p:txBody>
@@ -4655,13 +4655,13 @@
   <p:clrMapOvr>
     <a:masterClrMapping/>
   </p:clrMapOvr>
-  <mc:AlternateContent xmlns:mc="http://schemas.openxmlformats.org/markup-compatibility/2006">
-    <mc:Choice xmlns:p14="http://schemas.microsoft.com/office/powerpoint/2010/main" Requires="p14">
+  <mc:AlternateContent xmlns:mc="http://schemas.openxmlformats.org/markup-compatibility/2006" xmlns:p14="http://schemas.microsoft.com/office/powerpoint/2010/main">
+    <mc:Choice Requires="p14">
       <p:transition spd="slow" p14:dur="3400">
         <p14:reveal/>
       </p:transition>
     </mc:Choice>
-    <mc:Fallback>
+    <mc:Fallback xmlns="">
       <p:transition spd="slow">
         <p:fade/>
       </p:transition>
@@ -4763,8 +4763,8 @@
           <a:lstStyle/>
           <a:p>
             <a:r>
-              <a:rPr lang="en-US"/>
-              <a:t>https://www.youtube.com/@DigitsOnPrograms/videos</a:t>
+              <a:rPr lang="en-US" dirty="0"/>
+              <a:t>https://www.youtube.com/@GuardianAlgo/videos</a:t>
             </a:r>
           </a:p>
         </p:txBody>
@@ -4774,13 +4774,13 @@
   <p:clrMapOvr>
     <a:masterClrMapping/>
   </p:clrMapOvr>
-  <mc:AlternateContent xmlns:mc="http://schemas.openxmlformats.org/markup-compatibility/2006">
-    <mc:Choice xmlns:p15="http://schemas.microsoft.com/office/powerpoint/2012/main" Requires="p15">
+  <mc:AlternateContent xmlns:mc="http://schemas.openxmlformats.org/markup-compatibility/2006" xmlns:p15="http://schemas.microsoft.com/office/powerpoint/2012/main">
+    <mc:Choice Requires="p15">
       <p:transition xmlns:p14="http://schemas.microsoft.com/office/powerpoint/2010/main" spd="slow" p14:dur="2000">
         <p15:prstTrans prst="prestige"/>
       </p:transition>
     </mc:Choice>
-    <mc:Fallback>
+    <mc:Fallback xmlns="">
       <p:transition spd="slow">
         <p:fade/>
       </p:transition>
@@ -4856,13 +4856,14 @@
           <a:bodyPr/>
           <a:lstStyle/>
           <a:p>
-            <a:endParaRPr/>
+            <a:endParaRPr dirty="0"/>
           </a:p>
           <a:p>
             <a:pPr>
               <a:defRPr sz="2000"/>
             </a:pPr>
             <a:r>
+              <a:rPr dirty="0"/>
               <a:t>Validates strategy across historical data</a:t>
             </a:r>
           </a:p>
@@ -4871,6 +4872,7 @@
               <a:defRPr sz="2000"/>
             </a:pPr>
             <a:r>
+              <a:rPr dirty="0"/>
               <a:t>Helps avoid live-trading surprises</a:t>
             </a:r>
           </a:p>
@@ -4879,6 +4881,7 @@
               <a:defRPr sz="2000"/>
             </a:pPr>
             <a:r>
+              <a:rPr dirty="0"/>
               <a:t>Builds confidence in EA logic</a:t>
             </a:r>
           </a:p>
@@ -4906,8 +4909,8 @@
           <a:lstStyle/>
           <a:p>
             <a:r>
-              <a:rPr lang="en-US"/>
-              <a:t>https://www.youtube.com/@DigitsOnPrograms/videos</a:t>
+              <a:rPr lang="en-US" dirty="0"/>
+              <a:t>https://www.youtube.com/@GuardianAlgo/videos</a:t>
             </a:r>
           </a:p>
         </p:txBody>
@@ -5037,8 +5040,8 @@
           <a:lstStyle/>
           <a:p>
             <a:r>
-              <a:rPr lang="en-US"/>
-              <a:t>https://www.youtube.com/@DigitsOnPrograms/videos</a:t>
+              <a:rPr lang="en-US" dirty="0"/>
+              <a:t>https://www.youtube.com/@GuardianAlgo/videos</a:t>
             </a:r>
           </a:p>
         </p:txBody>
@@ -5048,13 +5051,13 @@
   <p:clrMapOvr>
     <a:masterClrMapping/>
   </p:clrMapOvr>
-  <mc:AlternateContent xmlns:mc="http://schemas.openxmlformats.org/markup-compatibility/2006">
-    <mc:Choice xmlns:p14="http://schemas.microsoft.com/office/powerpoint/2010/main" Requires="p14">
+  <mc:AlternateContent xmlns:mc="http://schemas.openxmlformats.org/markup-compatibility/2006" xmlns:p14="http://schemas.microsoft.com/office/powerpoint/2010/main">
+    <mc:Choice Requires="p14">
       <p:transition spd="slow" p14:dur="800">
         <p:circle/>
       </p:transition>
     </mc:Choice>
-    <mc:Fallback>
+    <mc:Fallback xmlns="">
       <p:transition spd="slow">
         <p:circle/>
       </p:transition>
@@ -5174,8 +5177,8 @@
           <a:lstStyle/>
           <a:p>
             <a:r>
-              <a:rPr lang="en-US"/>
-              <a:t>https://www.youtube.com/@DigitsOnPrograms/videos</a:t>
+              <a:rPr lang="en-US" dirty="0"/>
+              <a:t>https://www.youtube.com/@GuardianAlgo/videos</a:t>
             </a:r>
           </a:p>
         </p:txBody>
@@ -5294,8 +5297,8 @@
           <a:lstStyle/>
           <a:p>
             <a:r>
-              <a:rPr lang="en-US"/>
-              <a:t>https://www.youtube.com/@DigitsOnPrograms/videos</a:t>
+              <a:rPr lang="en-US" dirty="0"/>
+              <a:t>https://www.youtube.com/@GuardianAlgo/videos</a:t>
             </a:r>
           </a:p>
         </p:txBody>
@@ -5414,8 +5417,8 @@
           <a:lstStyle/>
           <a:p>
             <a:r>
-              <a:rPr lang="en-US"/>
-              <a:t>https://www.youtube.com/@DigitsOnPrograms/videos</a:t>
+              <a:rPr lang="en-US" dirty="0"/>
+              <a:t>https://www.youtube.com/@GuardianAlgo/videos</a:t>
             </a:r>
           </a:p>
         </p:txBody>
@@ -5425,13 +5428,13 @@
   <p:clrMapOvr>
     <a:masterClrMapping/>
   </p:clrMapOvr>
-  <mc:AlternateContent xmlns:mc="http://schemas.openxmlformats.org/markup-compatibility/2006">
-    <mc:Choice xmlns:p15="http://schemas.microsoft.com/office/powerpoint/2012/main" Requires="p15">
+  <mc:AlternateContent xmlns:mc="http://schemas.openxmlformats.org/markup-compatibility/2006" xmlns:p15="http://schemas.microsoft.com/office/powerpoint/2012/main">
+    <mc:Choice Requires="p15">
       <p:transition xmlns:p14="http://schemas.microsoft.com/office/powerpoint/2010/main" spd="slow" p14:dur="2000">
         <p15:prstTrans prst="fallOver"/>
       </p:transition>
     </mc:Choice>
-    <mc:Fallback>
+    <mc:Fallback xmlns="">
       <p:transition spd="slow">
         <p:fade/>
       </p:transition>
@@ -5551,8 +5554,8 @@
           <a:lstStyle/>
           <a:p>
             <a:r>
-              <a:rPr lang="en-US"/>
-              <a:t>https://www.youtube.com/@DigitsOnPrograms/videos</a:t>
+              <a:rPr lang="en-US" dirty="0"/>
+              <a:t>https://www.youtube.com/@GuardianAlgo/videos</a:t>
             </a:r>
           </a:p>
         </p:txBody>
@@ -5562,13 +5565,13 @@
   <p:clrMapOvr>
     <a:masterClrMapping/>
   </p:clrMapOvr>
-  <mc:AlternateContent xmlns:mc="http://schemas.openxmlformats.org/markup-compatibility/2006">
-    <mc:Choice xmlns:p15="http://schemas.microsoft.com/office/powerpoint/2012/main" Requires="p15">
+  <mc:AlternateContent xmlns:mc="http://schemas.openxmlformats.org/markup-compatibility/2006" xmlns:p15="http://schemas.microsoft.com/office/powerpoint/2012/main">
+    <mc:Choice Requires="p15">
       <p:transition xmlns:p14="http://schemas.microsoft.com/office/powerpoint/2010/main" spd="slow" p14:dur="2000">
         <p15:prstTrans prst="drape"/>
       </p:transition>
     </mc:Choice>
-    <mc:Fallback>
+    <mc:Fallback xmlns="">
       <p:transition spd="slow">
         <p:fade/>
       </p:transition>
@@ -5680,8 +5683,8 @@
           <a:lstStyle/>
           <a:p>
             <a:r>
-              <a:rPr lang="en-US"/>
-              <a:t>https://www.youtube.com/@DigitsOnPrograms/videos</a:t>
+              <a:rPr lang="en-US" dirty="0"/>
+              <a:t>https://www.youtube.com/@GuardianAlgo/videos</a:t>
             </a:r>
           </a:p>
         </p:txBody>
@@ -5721,13 +5724,13 @@
   <p:clrMapOvr>
     <a:masterClrMapping/>
   </p:clrMapOvr>
-  <mc:AlternateContent xmlns:mc="http://schemas.openxmlformats.org/markup-compatibility/2006">
-    <mc:Choice xmlns:p15="http://schemas.microsoft.com/office/powerpoint/2012/main" Requires="p15">
+  <mc:AlternateContent xmlns:mc="http://schemas.openxmlformats.org/markup-compatibility/2006" xmlns:p15="http://schemas.microsoft.com/office/powerpoint/2012/main">
+    <mc:Choice Requires="p15">
       <p:transition xmlns:p14="http://schemas.microsoft.com/office/powerpoint/2010/main" spd="slow" p14:dur="6000">
         <p15:prstTrans prst="curtains"/>
       </p:transition>
     </mc:Choice>
-    <mc:Fallback>
+    <mc:Fallback xmlns="">
       <p:transition spd="slow">
         <p:fade/>
       </p:transition>
@@ -5847,8 +5850,8 @@
           <a:lstStyle/>
           <a:p>
             <a:r>
-              <a:rPr lang="en-US"/>
-              <a:t>https://www.youtube.com/@DigitsOnPrograms/videos</a:t>
+              <a:rPr lang="en-US" dirty="0"/>
+              <a:t>https://www.youtube.com/@GuardianAlgo/videos</a:t>
             </a:r>
           </a:p>
         </p:txBody>
@@ -5858,13 +5861,13 @@
   <p:clrMapOvr>
     <a:masterClrMapping/>
   </p:clrMapOvr>
-  <mc:AlternateContent xmlns:mc="http://schemas.openxmlformats.org/markup-compatibility/2006">
-    <mc:Choice xmlns:p15="http://schemas.microsoft.com/office/powerpoint/2012/main" Requires="p15">
+  <mc:AlternateContent xmlns:mc="http://schemas.openxmlformats.org/markup-compatibility/2006" xmlns:p15="http://schemas.microsoft.com/office/powerpoint/2012/main">
+    <mc:Choice Requires="p15">
       <p:transition xmlns:p14="http://schemas.microsoft.com/office/powerpoint/2010/main" spd="slow" p14:dur="2000">
         <p15:prstTrans prst="wind"/>
       </p:transition>
     </mc:Choice>
-    <mc:Fallback>
+    <mc:Fallback xmlns="">
       <p:transition spd="slow">
         <p:fade/>
       </p:transition>
